--- a/decks/hist-dictatorship/hist-dictatorship_ch1_democracy-dictatorship.pptx
+++ b/decks/hist-dictatorship/hist-dictatorship_ch1_democracy-dictatorship.pptx
@@ -129,31 +129,31 @@
   <p:extLst>
     <p:ext uri="{521415D9-36F7-43E2-AB2F-B90AF26B5E84}">
       <p14:sectionLst xmlns:p14="http://schemas.microsoft.com/office/powerpoint/2010/main">
-        <p14:section name="Opening" id="{1076fb51-0a4d-2375-d7f8-208f049fd6c0}">
+        <p14:section name="Opening" id="{2f21871c-0814-586d-ac9a-8b876b966d68}">
           <p14:sldIdLst>
             <p14:sldId id="256"/>
           </p14:sldIdLst>
         </p14:section>
-        <p14:section name="Gate" id="{ce042e14-c26d-a9d4-4112-e08c23676b73}">
+        <p14:section name="Gate" id="{0e117ca2-6cb2-ac4a-c561-f80c50798683}">
           <p14:sldIdLst>
             <p14:sldId id="257"/>
             <p14:sldId id="258"/>
             <p14:sldId id="259"/>
           </p14:sldIdLst>
         </p14:section>
-        <p14:section name="Pre-teach" id="{175ca471-70f8-c429-dc85-e8aee0bebb3f}">
+        <p14:section name="Pre-teach" id="{a5350c68-910a-5788-0f3b-94eeaf62ba88}">
           <p14:sldIdLst>
             <p14:sldId id="260"/>
             <p14:sldId id="261"/>
           </p14:sldIdLst>
         </p14:section>
-        <p14:section name="Read-along" id="{9631547a-ce89-a5f4-7293-75b67e0c13c9}">
+        <p14:section name="Read-along" id="{1f0287e1-2bc3-4bad-4804-b5f326743b85}">
           <p14:sldIdLst>
             <p14:sldId id="262"/>
             <p14:sldId id="263"/>
           </p14:sldIdLst>
         </p14:section>
-        <p14:section name="Teach" id="{2621dd63-605e-3d09-b9e0-49b992d371a5}">
+        <p14:section name="Teach" id="{6ca8cbe2-fe9a-c230-56b2-ebf737e5a478}">
           <p14:sldIdLst>
             <p14:sldId id="264"/>
             <p14:sldId id="265"/>
@@ -162,7 +162,7 @@
             <p14:sldId id="268"/>
           </p14:sldIdLst>
         </p14:section>
-        <p14:section name="Routes" id="{37a63142-5091-b817-a4d7-a20301260f5a}">
+        <p14:section name="Routes" id="{f2b60f52-2d36-c2c5-8230-a5ba49a323a3}">
           <p14:sldIdLst>
             <p14:sldId id="269"/>
             <p14:sldId id="270"/>
@@ -171,12 +171,12 @@
             <p14:sldId id="273"/>
           </p14:sldIdLst>
         </p14:section>
-        <p14:section name="Close" id="{c4b036e6-3c4e-4ab9-aa1d-fdc941d914d9}">
+        <p14:section name="Close" id="{87718767-1c71-d9f5-57a7-2b180ad4496d}">
           <p14:sldIdLst>
             <p14:sldId id="274"/>
           </p14:sldIdLst>
         </p14:section>
-        <p14:section name="Answers" id="{52d36195-9f54-e552-9ad0-004607d82731}">
+        <p14:section name="Answers" id="{9dc76a79-8495-8cb3-7ef6-5ce6ea8a5ea8}">
           <p14:sldIdLst>
             <p14:sldId id="275"/>
             <p14:sldId id="276"/>
@@ -865,8 +865,8 @@
             <a:r>
               <a:rPr lang="en-US" dirty="0"/>
               <a:t>Teach — Totalitarianism: control over everything. Say it in your own words, then check understanding with a quick question: ask a pupil from the pre-teach group first, since they met these words and ideas before the lesson. Pupils try to recall before you re-explain.
-Dictators have complete control over the country that they rule. They decide all of the laws and make all of the important decisions, and the wishes and the rights of the people are ignored in favour of the wishes of the dictator. To make sure the dictatorship keeps its power, it takes total control over the people and society. Your lesson gives this a name: totalitarianism.
-Totalitarianism is a type of government that has complete control over the people and society in order to maintain the power of the dictator. The people have no rights and no individual freedoms, and there is no opposition to the dictator. The word matters because it points at the reach of the control, not just its harshness.
+A dictator rules a country outright. Every law and every important decision is his to make, and what the people want, or are entitled to, counts for nothing beside what he wants. Holding on to that position takes more than controlling the government, so a dictatorship reaches into the whole of people's lives: their work, their schooling, their newspapers and their free time. Your lesson gives that reach a name: totalitarianism.
+Totalitarianism, as your lesson defines it, is government that controls people and society so completely that the dictator's power can never be challenged. Nobody keeps any rights or personal freedoms, and no opposition is allowed to exist at all. The word matters because it points at the reach of the control, not just its harshness.
 Your lesson listed the levers a totalitarian state pulls: elections, the police and the army, opposition parties, and the media and the press. Keep that list beside you. In chapters 3, 4 and 6 you will see Hitler and Stalin pulling exactly these levers, and you will be asked how similar their methods were.
 Tip: Dictatorship describes who holds power. Totalitarianism describes how far that power reaches. A question about control of schools or newspapers is a question about totalitarianism.</a:t>
             </a:r>
@@ -6115,7 +6115,7 @@
               <a:buNone/>
             </a:pPr>
             <a:r>
-              <a:rPr lang="en-US" sz="2200" dirty="0">
+              <a:rPr lang="en-US" sz="2000" dirty="0">
                 <a:solidFill>
                   <a:srgbClr val="1E2229"/>
                 </a:solidFill>
@@ -6123,9 +6123,9 @@
                 <a:ea typeface="Calibri" pitchFamily="34" charset="-122"/>
                 <a:cs typeface="Calibri" pitchFamily="34" charset="-120"/>
               </a:rPr>
-              <a:t>Dictators have complete control over the country that they rule.</a:t>
-            </a:r>
-            <a:endParaRPr lang="en-US" sz="2200" dirty="0"/>
+              <a:t>A dictator rules a country outright. Every law and every important decision is his to make, and what the people want, or are entitled to, counts for nothing beside what he wants.</a:t>
+            </a:r>
+            <a:endParaRPr lang="en-US" sz="2000" dirty="0"/>
           </a:p>
         </p:txBody>
       </p:sp>
@@ -6235,7 +6235,7 @@
               <a:buNone/>
             </a:pPr>
             <a:r>
-              <a:rPr lang="en-US" sz="2200" dirty="0">
+              <a:rPr lang="en-US" sz="2000" dirty="0">
                 <a:solidFill>
                   <a:srgbClr val="1E2229"/>
                 </a:solidFill>
@@ -6243,9 +6243,9 @@
                 <a:ea typeface="Calibri" pitchFamily="34" charset="-122"/>
                 <a:cs typeface="Calibri" pitchFamily="34" charset="-120"/>
               </a:rPr>
-              <a:t>Totalitarianism is a type of government that has complete control over the people and society in order to maintain the power of the dictator.</a:t>
-            </a:r>
-            <a:endParaRPr lang="en-US" sz="2200" dirty="0"/>
+              <a:t>Totalitarianism, as your lesson defines it, is government that controls people and society so completely that the dictator's power can never be challenged.</a:t>
+            </a:r>
+            <a:endParaRPr lang="en-US" sz="2000" dirty="0"/>
           </a:p>
         </p:txBody>
       </p:sp>
@@ -6355,7 +6355,7 @@
               <a:buNone/>
             </a:pPr>
             <a:r>
-              <a:rPr lang="en-US" sz="2200" dirty="0">
+              <a:rPr lang="en-US" sz="2000" dirty="0">
                 <a:solidFill>
                   <a:srgbClr val="1E2229"/>
                 </a:solidFill>
@@ -6365,7 +6365,7 @@
               </a:rPr>
               <a:t>Your lesson listed the levers a totalitarian state pulls: elections, the police and the army, opposition parties, and the media and the press.</a:t>
             </a:r>
-            <a:endParaRPr lang="en-US" sz="2200" dirty="0"/>
+            <a:endParaRPr lang="en-US" sz="2000" dirty="0"/>
           </a:p>
         </p:txBody>
       </p:sp>
